--- a/OPT_DROGURI/ro/fisiere/C03.pptx
+++ b/OPT_DROGURI/ro/fisiere/C03.pptx
@@ -543,10 +543,8 @@
           <a:lstStyle/>
           <a:p>
             <a:r>
-              <a:rPr lang="en-US" dirty="0"/>
-              <a:t>Bine ați venit la a treia ședință. Azi vorbim despre Portugalia și despre cannabis, dar întrebarea din titlu e mai largă: cum despărțim, într-o discuție despre droguri, ce s-a întâmplat de ce ar trebui să facem.</a:t>
-            </a:r>
-            <a:endParaRPr lang="en-US" dirty="0"/>
+              <a:t>Bine ați venit la a treia ședință, de data aceasta pe Teams. Azi vorbim despre Portugalia și despre cannabis, dar întrebarea din titlu este mai largă: cum despărțim, într-o discuție despre droguri, ce s-a întâmplat de ce ar trebui să facem. Deschideți Mentimeter de acum: scanați codul de pe ecran sau folosiți linkul din chat. Votăm în primele minute.</a:t>
+            </a:r>
           </a:p>
         </p:txBody>
       </p:sp>
@@ -631,10 +629,8 @@
           <a:lstStyle/>
           <a:p>
             <a:r>
-              <a:rPr lang="en-US" dirty="0"/>
-              <a:t>Comisia nu spune „a scăzut”. Spune „fără o creștere semnificativă”. Și, la HIV, spune „împreună cu extinderea serviciilor”. Comisia are o poziție declarată: recomandă dezincriminarea. Poziția nu îi invalidează datele, dar se spune odată cu citarea.</a:t>
-            </a:r>
-            <a:endParaRPr lang="en-US" dirty="0"/>
+              <a:t>Comisia internațională pentru sănătate publică și politica drogurilor, publicată în 2016 de revista The Lancet, rezumă așa: Portugalia a dezincriminat faptele minore legate de droguri, cu economii, mai puține încarcerări, beneficii pentru sănătatea publică și fără o creștere semnificativă a consumului. Comisia nu spune „a scăzut”. Spune „fără o creștere semnificativă”. Citiți apoi a doua frază încă o dată. La HIV, comisia nu scrie că dezincriminarea a oprit epidemia, ci că dezincriminarea, împreună cu extinderea serviciilor de prevenire, a permis controlul ei. Comisia are o poziție declarată: recomandă dezincriminarea, iar unul dintre autori era afiliat Ministerului Sănătății portughez. Poziția nu îi invalidează datele, dar se spune odată cu citarea.</a:t>
+            </a:r>
           </a:p>
         </p:txBody>
       </p:sp>
@@ -719,10 +715,8 @@
           <a:lstStyle/>
           <a:p>
             <a:r>
-              <a:rPr lang="en-US" dirty="0"/>
-              <a:t>Primul termen nou: problema atribuirii. Pe scurt: știm că s-a îmbunătățit, nu știm cui îi dăm meritul. În Portugalia, legea și serviciile au venit deodată, iar datele nu le pot separa retrospectiv. Exemplul spitalului are valori ipotetice; ca să împărțiți meritul, v-ar trebui un spital care a făcut doar una dintre schimbări.</a:t>
-            </a:r>
-            <a:endParaRPr lang="en-US" dirty="0"/>
+              <a:t>Primul termen nou: problema atribuirii. Este situația în care două sau mai multe schimbări au avut loc în același timp, iar datele nu permit să spuneți cât din rezultat se datorează fiecăreia. Pe scurt: știm că s-a îmbunătățit, nu știm cui îi dăm meritul. În Portugalia, oamenii au încetat să primească dosar penal pentru consum și, în aceeași perioadă, au primit mai ușor acces la prevenire și tratament. Datele nu le pot separa retrospectiv. O analiză portugheză din 2021 ajunge la o concluzie apropiată: scăderea infecțiilor și a încarcerărilor nu poate fi legată liniar de lege. Exemplul spitalului are valori ipotetice: directorul și sindicatul citesc aceeași cifră. Ca să împărțiți meritul, v-ar trebui un spital care a făcut doar una dintre schimbări.</a:t>
+            </a:r>
           </a:p>
         </p:txBody>
       </p:sp>
@@ -807,10 +801,8 @@
           <a:lstStyle/>
           <a:p>
             <a:r>
-              <a:rPr lang="en-US" dirty="0"/>
-              <a:t>Un titlu construit după cele care circulă. L-ați crede? După vot: care cuvânt din titlu spune mai mult decât datele?</a:t>
-            </a:r>
-            <a:endParaRPr lang="en-US" dirty="0"/>
+              <a:t>Un titlu construit după cele care circulă: „Portugalia a învins drogurile prin lege.” L-ați crede? Votați pe Mentimeter: da, nu sau depinde. După vot, scrieți în chat, pe scurt, ce cuvânt din titlu spune mai mult decât datele. Citim apoi trei dintre răspunsurile voastre.</a:t>
+            </a:r>
           </a:p>
         </p:txBody>
       </p:sp>
@@ -895,10 +887,8 @@
           <a:lstStyle/>
           <a:p>
             <a:r>
-              <a:rPr lang="en-US" dirty="0"/>
-              <a:t>Cuvântul care depășește datele este „prin lege”. Rezultatul a venit cu legea și cu serviciile. Iar „a învins” este o judecată, nu un rezultat. Afirmația solidă e mai modestă: consumul nu a explodat.</a:t>
-            </a:r>
-            <a:endParaRPr lang="en-US" dirty="0"/>
+              <a:t>Cuvântul care depășește datele este „prin lege”. Rezultatul a venit cu legea și cu serviciile, nu numai prin lege: este chiar problema atribuirii. Iar „a învins” este o judecată pe care nicio sursă citată aici nu o face, nu un rezultat. Ce putem spune solid este mai modest: după dezincriminare nu a urmat explozia de consum de care se temeau criticii. Este o afirmație despre ceva ce nu s-a întâmplat, iar ca să o răsturnați ar trebui să găsiți o creștere pe care datele nu o conțin. Afirmația „legea a scăzut decesele și infecțiile” este mai puternică și nu poate fi separată de serviciile introduse în aceeași perioadă.</a:t>
+            </a:r>
           </a:p>
         </p:txBody>
       </p:sp>
@@ -983,10 +973,8 @@
           <a:lstStyle/>
           <a:p>
             <a:r>
-              <a:rPr lang="en-US" dirty="0"/>
-              <a:t>Legea nu a rămas neschimbată în practică. În 2008, Curtea Supremă portugheză a restabilit calificarea de infracțiune peste pragul de zece zile. Și rețineți diferența: Portugalia a dezincriminat, nu a legalizat. Despre cifrele recente din presă, regula e aceeași în ambele direcții: care indicator, în ce an, din ce sursă.</a:t>
-            </a:r>
-            <a:endParaRPr lang="en-US" dirty="0"/>
+              <a:t>Legea nu a rămas neschimbată în practică. În 2008, o hotărâre a Curții Supreme portugheze a restabilit calificarea de infracțiune pentru consum atunci când cantitatea depășește pe cea necesară pentru zece zile. O analiză din 2021 descrie un paradox: o țară care a dezincriminat consumul a devenit, în ultimul deceniu, mai severă cu consumatorii, inclusiv prin pedepse cu închisoare. Și rețineți diferența: Portugalia a dezincriminat, nu a legalizat. Consumatorul nu mai e infractor, dar cine vinde rămâne în afara legii, iar statul nu controlează ce se vinde: nici puritatea, nici concentrația. Despre cifrele recente din presă, decese, seringi, bugete, regula e aceeași în ambele direcții: care indicator, în ce an, din ce sursă.</a:t>
+            </a:r>
           </a:p>
         </p:txBody>
       </p:sp>
@@ -1071,10 +1059,8 @@
           <a:lstStyle/>
           <a:p>
             <a:r>
-              <a:rPr lang="en-US" dirty="0"/>
-              <a:t>Portugalia nu a legalizat drogurile: a scos consumul din codul penal și a extins, în același timp, tratamentul. Consumul nu a explodat. Cât din rest se datorează legii, nu știe nimeni.</a:t>
-            </a:r>
-            <a:endParaRPr lang="en-US" dirty="0"/>
+              <a:t>Prima parte se încheie cu o frază pe care o puteți spune mâine unui coleg. Portugalia nu a legalizat drogurile: a scos consumul din codul penal și a trimis oamenii la o comisie, iar în același timp a extins tratamentul. Consumul nu a explodat. Cât din rest se datorează legii, nu știe nimeni. Scrieți-o acum în chat, cu cuvintele voastre.</a:t>
+            </a:r>
           </a:p>
         </p:txBody>
       </p:sp>
@@ -1159,10 +1145,8 @@
           <a:lstStyle/>
           <a:p>
             <a:r>
-              <a:rPr lang="en-US" dirty="0"/>
-              <a:t>Aceeași moțiune ca la început. Partea stângă susține, partea dreaptă se opune, indiferent ce ați votat. Scopul nu este să câștige cineva: urmăriți, în propriile argumente, unde se termină faptul și unde începe valoarea.</a:t>
-            </a:r>
-            <a:endParaRPr lang="en-US" dirty="0"/>
+              <a:t>Aceeași moțiune ca la început. Ne împărțim în două tabere după luna nașterii: cei născuți între ianuarie și iunie susțin moțiunea, cei născuți între iulie și decembrie i se opun, indiferent ce ați votat. Strângeți argumentele în chat, cu numele taberei în față: „PENTRU:” sau „ÎMPOTRIVĂ:”. Scopul nu este să câștige cineva: urmăriți, în propriile argumente, unde se termină faptul și unde începe valoarea. Dezbaterea nu se notează.</a:t>
+            </a:r>
           </a:p>
         </p:txBody>
       </p:sp>
@@ -1247,10 +1231,8 @@
           <a:lstStyle/>
           <a:p>
             <a:r>
-              <a:rPr lang="en-US" dirty="0"/>
-              <a:t>Doi voluntari din fiecare tabără, câte un minut. Cei care ascultă notează afirmațiile care s-ar putea verifica într-o sursă.</a:t>
-            </a:r>
-            <a:endParaRPr lang="en-US" dirty="0"/>
+              <a:t>Prima rundă: doi voluntari din fiecare tabără, câte un minut. Cine vrea să vorbească folosește reacția „mână ridicată” din Teams și își pornește microfonul când este numit. Ceilalți scriu în chat afirmațiile din argument care s-ar putea verifica într-o sursă. La final vom vedea câte dintre ele sunt fapte și câte sunt alegeri de valori.</a:t>
+            </a:r>
           </a:p>
         </p:txBody>
       </p:sp>
@@ -1335,10 +1317,8 @@
           <a:lstStyle/>
           <a:p>
             <a:r>
-              <a:rPr lang="en-US" dirty="0"/>
-              <a:t>Fiecare tabără primește dovada care îi contrazice poziția. Regula: o includeți în argument, nu o ocoliți. Un argument care rezistă dovezii contrare e mai puternic decât unul care nu o cunoaște.</a:t>
-            </a:r>
-            <a:endParaRPr lang="en-US" dirty="0"/>
+              <a:t>Fiecare tabără primește dovada care îi contrazice poziția. Tabăra „pentru” primește problema atribuirii: rezultatele bune au venit împreună cu extinderea serviciilor și nu pot fi atribuite numai legii. Tabăra „împotrivă” primește concluzia comisiei din 2016: fără creștere semnificativă a consumului și cu mai puține încarcerări. Regula: includeți dovada în argument, nu o ocoliți. Câte un voluntar pe tabără, un minut, tot cu reacția „mână ridicată”. Un argument care rezistă dovezii contrare este mai puternic decât unul care nu o cunoaște.</a:t>
+            </a:r>
           </a:p>
         </p:txBody>
       </p:sp>
@@ -1423,10 +1403,8 @@
           <a:lstStyle/>
           <a:p>
             <a:r>
-              <a:rPr lang="en-US" dirty="0"/>
-              <a:t>Cinci propoziții, cinci voturi rapide. Pentru fiecare: este un fapt verificabil, o alegere de valori sau altceva?</a:t>
-            </a:r>
-            <a:endParaRPr lang="en-US" dirty="0"/>
+              <a:t>Cinci propoziții auzite în dezbaterile despre droguri, cinci voturi rapide pe Mentimeter. Pentru fiecare, decideți: este un fapt verificabil, o alegere de valori sau o predicție despre ce s-ar întâmpla? Folosiți întrebarea de la începutul ședinței: aș putea verifica asta într-o sursă?</a:t>
+            </a:r>
           </a:p>
         </p:txBody>
       </p:sp>
@@ -1511,10 +1489,8 @@
           <a:lstStyle/>
           <a:p>
             <a:r>
-              <a:rPr lang="en-US" dirty="0"/>
-              <a:t>Am citit biletele de ieșire de data trecută. Două lucruri se schimbă de azi: cifrele vin ca frecvențe, din 100 de oameni, cu un singur grafic, și ritmul e mai alert. Fiecare parte se încheie cu o frază pe care o puteți spune mâine unui coleg.</a:t>
-            </a:r>
-            <a:endParaRPr lang="en-US" dirty="0"/>
+              <a:t>Am citit biletele de ieșire de data trecută. Două lucruri se schimbă de azi: cifrele vin ca frecvențe, din 100 de oameni, cu un singur grafic, și ritmul este mai alert. Fiecare parte se încheie cu o frază pe care o puteți spune mâine unui coleg; azi o scrieți mai întâi în chat.</a:t>
+            </a:r>
           </a:p>
         </p:txBody>
       </p:sp>
@@ -1599,10 +1575,8 @@
           <a:lstStyle/>
           <a:p>
             <a:r>
-              <a:rPr lang="en-US" dirty="0"/>
-              <a:t>Între fapt și valoare există un al treilea tip: predicția despre ce s-ar întâmpla la noi. Și rețineți propoziția d: este o afirmație de fapt, chiar dacă datele portugheze nu o susțin. O afirmație falsă tot de fapt rămâne.</a:t>
-            </a:r>
-            <a:endParaRPr lang="en-US" dirty="0"/>
+              <a:t>Să luăm propozițiile pe rând. Prima, despre consumul de după 2001, este un fapt, cu sursă. A doua, despre cazier, este o alegere de valori: nicio sursă nu o poate dovedi sau infirma. A treia, despre mesajul ferm, este tot o valoare, deși sună ca un fapt. A patra este o afirmație de fapt, iar datele portugheze nu o susțin; o afirmație falsă tot de fapt rămâne și se verifică. Ultima ne duce la al treilea tip: predicția despre ce s-ar întâmpla la noi. Pare științifică, dar depinde de lucruri pe care Portugalia nu le poate spune despre România: câți medici și psihologi ar avea comisiile, cât de repede s-ar înființa serviciile, cum ar aplica poliția legea.</a:t>
+            </a:r>
           </a:p>
         </p:txBody>
       </p:sp>
@@ -1687,10 +1661,8 @@
           <a:lstStyle/>
           <a:p>
             <a:r>
-              <a:rPr lang="en-US" dirty="0"/>
-              <a:t>Votați din nou, pe aceeași moțiune. Nu contează în ce direcție v-ați mișcat, ci dacă știți de ce.</a:t>
-            </a:r>
-            <a:endParaRPr lang="en-US" dirty="0"/>
+              <a:t>Votați din nou pe Mentimeter, pe aceeași moțiune și cu aceleași cinci variante. Primul și al doilea vot apar unul lângă altul. Nu contează în ce direcție v-ați mișcat, ci dacă știți de ce. Dacă vreți, scrieți în chat ce argument sau ce dovadă v-a schimbat votul.</a:t>
+            </a:r>
           </a:p>
         </p:txBody>
       </p:sp>
@@ -1775,10 +1747,8 @@
           <a:lstStyle/>
           <a:p>
             <a:r>
-              <a:rPr lang="en-US" dirty="0"/>
-              <a:t>Când auziți un argument despre droguri, întrebați-vă: pot verifica asta într-o sursă? Dacă da, căutați sursa. Dacă nu, discutați despre ce vreți, nu despre ce s-a întâmplat.</a:t>
-            </a:r>
-            <a:endParaRPr lang="en-US" dirty="0"/>
+              <a:t>Partea a doua se încheie, ca prima, cu o frază pentru mâine. Când auziți un argument despre droguri, întrebați-vă: pot verifica asta într-o sursă? Dacă da, căutați sursa. Dacă nu, discutați despre ce vreți, nu despre ce s-a întâmplat. Scrieți-o în chat, cu cuvintele voastre.</a:t>
+            </a:r>
           </a:p>
         </p:txBody>
       </p:sp>
@@ -1863,10 +1833,8 @@
           <a:lstStyle/>
           <a:p>
             <a:r>
-              <a:rPr lang="en-US" dirty="0"/>
-              <a:t>Ne vedem în zece minute. Urmează partea despre cannabis ca medicament.</a:t>
-            </a:r>
-            <a:endParaRPr lang="en-US" dirty="0"/>
+              <a:t>Ne vedem în zece minute; puteți lăsa Teams deschis. Reluăm cu partea despre cannabis ca medicament: uleiul bunicii, colegul de apartament și copiii mici din Ontario. Când reveniți, țineți Mentimeter la îndemână: urmează un vot chiar la început.</a:t>
+            </a:r>
           </a:p>
         </p:txBody>
       </p:sp>
@@ -1951,10 +1919,8 @@
           <a:lstStyle/>
           <a:p>
             <a:r>
-              <a:rPr lang="en-US" dirty="0"/>
-              <a:t>Un mesaj pe care mulți dintre voi îl veți primi. Bunica unei colege face chimioterapie, îi este rău după fiecare cură, iar o vecină i-a adus un ulei de cannabis. Ce îi răspundeți?</a:t>
-            </a:r>
-            <a:endParaRPr lang="en-US" dirty="0"/>
+              <a:t>Partea a treia începe cu un mesaj pe care mulți dintre voi îl veți primi. Bunica unei colege face chimioterapie și îi este rău după fiecare cură, deși ia medicamentele împotriva vărsăturilor. O vecină i-a adus un ulei „de cannabis, natural, care vindecă și cancerul”. Colega vă scrie duminică seara: „Tu ești la medicină. Merge?” Mesajul amestecă două întrebări: dacă un medicament din cannabis ajută la greață și dacă un ulei tratează cancerul. Ca la Portugalia, le despărțim și căutăm, pentru fiecare, ce spun sursele. Gândiți-vă ce i-ați răspunde, înainte de vot.</a:t>
+            </a:r>
           </a:p>
         </p:txBody>
       </p:sp>
@@ -2039,10 +2005,8 @@
           <a:lstStyle/>
           <a:p>
             <a:r>
-              <a:rPr lang="en-US" dirty="0"/>
-              <a:t>Patru răspunsuri posibile. Alegeți-l pe cel pe care l-ați trimite.</a:t>
-            </a:r>
-            <a:endParaRPr lang="en-US" dirty="0"/>
+              <a:t>Patru răspunsuri posibile la mesajul colegei. Alegeți pe Mentimeter varianta pe care ați trimite-o cu adevărat, nu pe cea care vi se pare că ar trebui aleasă. Codul e pe ecran, linkul e și în chat. Imediat după vot vedem ce spun dovezile despre fiecare variantă.</a:t>
+            </a:r>
           </a:p>
         </p:txBody>
       </p:sp>
@@ -2127,10 +2091,8 @@
           <a:lstStyle/>
           <a:p>
             <a:r>
-              <a:rPr lang="en-US" dirty="0"/>
-              <a:t>Varianta sprijinită de dovezi e B. Raportul academiilor americane din 2017 găsește dovezi solide pentru trei situații, nu pentru douăzeci. Și la a treia situație a pus în formulare două cuvinte care contează: raportată de pacient.</a:t>
-            </a:r>
-            <a:endParaRPr lang="en-US" dirty="0"/>
+              <a:t>Varianta sprijinită de dovezi e B, iar motivul arată de ce trebuie despărțite cannabisul ca medicament și cannabisul recreațional. În 2017, Academiile Naționale de Științe, Inginerie și Medicină ale Statelor Unite au clasificat dovezile despre efectele cannabisului pe niveluri. La nivelul cel mai înalt, dovezi concludente sau substanțiale, raportul găsește trei situații, nu douăzeci: durerea cronică la adulți, greața și vărsăturile produse de chimioterapie, pentru canabinoizii administrați oral, și spasticitatea din scleroza multiplă. Iar la a treia situație raportul a pus în formulare două cuvinte care contează: raportată de pacient. Ele ne duc la al doilea termen nou.</a:t>
+            </a:r>
           </a:p>
         </p:txBody>
       </p:sp>
@@ -2215,10 +2177,8 @@
           <a:lstStyle/>
           <a:p>
             <a:r>
-              <a:rPr lang="en-US" dirty="0"/>
-              <a:t>Al doilea termen nou: rezultatul raportat de pacient. În cuvinte obișnuite: ce simte pacientul, față de ce găsește medicul.</a:t>
-            </a:r>
-            <a:endParaRPr lang="en-US" dirty="0"/>
+              <a:t>Al doilea termen nou: rezultatul raportat de pacient. Este un rezultat al tratamentului pe care îl spune pacientul însuși, de obicei printr-un chestionar, de exemplu „cât de rigid vă simțiți piciorul?”. Se deosebește de un rezultat măsurat de un examinator, cu o scală sau cu un instrument. În cuvinte obișnuite: ce simte pacientul, față de ce găsește medicul. Amândouă sunt rezultate reale, dar nu sunt același lucru și nu se citează la fel. Când un rezultat raportat de pacient e citat fără aceste cuvinte, el devine, pe nesimțite, o afirmație despre boală.</a:t>
+            </a:r>
           </a:p>
         </p:txBody>
       </p:sp>
@@ -2303,10 +2263,8 @@
           <a:lstStyle/>
           <a:p>
             <a:r>
-              <a:rPr lang="en-US" dirty="0"/>
-              <a:t>Pentru bunica colegei: canabinoizii pot fi un adaos, nu un înlocuitor, și numai când tratamentul standard nu a ajuns. Pentru tratamentul cancerului, ghidul spune să nu fie folosiți în afara studiilor clinice. La scleroza multiplă, pacienții au raportat ameliorare, iar scala aplicată de examinator nu a arătat niciun efect.</a:t>
-            </a:r>
-            <a:endParaRPr lang="en-US" dirty="0"/>
+              <a:t>Ghidul Societății Americane de Oncologie Clinică (ASCO) din 2024 precizează ce înseamnă asta pentru bunica colegei. La adulții care primesc chimioterapie cu potențial emetogen moderat sau mare, cu profilaxia recomandată, și care au în continuare greață sau vărsături, tratamentul poate fi completat cu un canabinoid. Recomandarea este slabă, iar calitatea dovezilor este moderată, scăzută pentru extractul THC:CBD. Canabinoizii pot fi deci un adaos, nu un înlocuitor, și numai când tratamentul standard nu a ajuns. Pentru tratamentul cancerului, ghidul spune să nu fie folosiți în afara studiilor clinice. La scleroza multiplă, o meta-analiză din 2018 a reunit 17 studii clinice, cu 3 161 de pacienți: pacienții au raportat ameliorare, iar scala Ashworth, aplicată de examinator, nu a arătat niciun efect.</a:t>
+            </a:r>
           </a:p>
         </p:txBody>
       </p:sp>
@@ -2391,10 +2349,8 @@
           <a:lstStyle/>
           <a:p>
             <a:r>
-              <a:rPr lang="en-US" dirty="0"/>
-              <a:t>Pacientul spune că îi este mai bine, examinatorul nu găsește nicio schimbare. Cine are dreptate? Notați împreună cu colegul două explicații.</a:t>
-            </a:r>
-            <a:endParaRPr lang="en-US" dirty="0"/>
+              <a:t>Pacientul spune că îi este mai bine, examinatorul nu găsește nicio schimbare. Cine are dreptate? Scrieți în chat două explicații posibile, câte o frază fiecare. Nu căutați o singură variantă bună: căutați explicații care se potrivesc ambelor observații. Le citim apoi pe câteva și le comparăm cu explicațiile din surse.</a:t>
+            </a:r>
           </a:p>
         </p:txBody>
       </p:sp>
@@ -2479,10 +2435,8 @@
           <a:lstStyle/>
           <a:p>
             <a:r>
-              <a:rPr lang="en-US" dirty="0"/>
-              <a:t>Două linkuri, la zece minute distanță. Se contrazic pentru că amestecă două feluri de întrebări, nu pentru că unul ar minți. Prima întrebare se verifică într-o sursă. A doua se discută cu valori. Răspunsul provizoriu la titlu: despre fiecare propoziție, întrebați „aș putea verifica asta într-o sursă?”.</a:t>
-            </a:r>
-            <a:endParaRPr lang="en-US" dirty="0"/>
+              <a:t>Să pornim de la o seară obișnuită pe grupul anului. Apar două linkuri, la zece minute distanță. Primul spune că Portugalia a dezincriminat toate drogurile și a scăpat de ele. Al doilea arată o stradă din Porto cu seringi pe trotuar și concluzionează că modelul portughez a eșuat. Cineva întreabă care e adevărat, altcineva spune că depinde de ce partid votezi. Al doilea coleg are, fără să știe, jumătate de dreptate. Titlurile se contrazic pentru că amestecă două feluri de întrebări, nu pentru că unul ar minți. Prima, ce s-a întâmplat, se verifică într-o sursă: este o întrebare de știință. A doua, ce ar trebui să facem, se discută cu valori: este o întrebare de politică. Răspunsul provizoriu la titlul ședinței: despre fiecare propoziție, întrebați „aș putea verifica asta într-o sursă?”.</a:t>
+            </a:r>
           </a:p>
         </p:txBody>
       </p:sp>
@@ -2567,10 +2521,8 @@
           <a:lstStyle/>
           <a:p>
             <a:r>
-              <a:rPr lang="en-US" dirty="0"/>
-              <a:t>Toate trei explicațiile sunt legitime, iar datele de aici nu decid între ele. Ce puteți face e să urmăriți formularea exactă. Iar la durere, două întrebări: cât de mare este efectul și la ce fel de durere.</a:t>
-            </a:r>
-            <a:endParaRPr lang="en-US" dirty="0"/>
+              <a:t>Există cel puțin trei explicații, și toate sunt legitime. Prima: scala aplicată de examinator nu prinde ce contează pentru pacient, iar rigiditatea trăită și cea măsurată nu sunt același lucru. A doua: o parte din ameliorare poate fi efect placebo, iar efectele psihoactive ale cannabisului îi pot face pe pacienți să ghicească dacă au primit substanța activă. A treia: amândouă. Datele de aici nu decid între ele. Ce puteți face e să urmăriți formularea exactă: când cuvintele „raportat de pacient” dispar la citare, o afirmație despre ce simte pacientul devine una despre boală. Iar la durere, prima situație din lista raportului din 2017, două întrebări: cât de mare este efectul și la ce fel de durere.</a:t>
+            </a:r>
           </a:p>
         </p:txBody>
       </p:sp>
@@ -2655,10 +2607,8 @@
           <a:lstStyle/>
           <a:p>
             <a:r>
-              <a:rPr lang="en-US" dirty="0"/>
-              <a:t>Ce se știe sigur: consumul de cannabis are o asociere dovedită cu psihoza, iar riscul cel mai mare e la cei care consumă cel mai des. Autorii spun însă că o legătură cauzală nu poate fi stabilită fără echivoc din aceste date.</a:t>
-            </a:r>
-            <a:endParaRPr lang="en-US" dirty="0"/>
+              <a:t>Un alt mesaj, de data aceasta despre colegul de apartament. Fumează cannabis aproape în fiecare seară, ca să se relaxeze după învățat. Într-o seară vă scrie că cineva îl urmărește prin telefon; a doua zi spune că a glumit. Ce se știe sigur: consumul de cannabis are o asociere dovedită cu schizofrenia și cu alte psihoze, iar riscul cel mai mare e la cei care consumă cel mai des. O meta-analiză a găsit, la consumatorii cei mai intensivi, șanse de aproape patru ori mai mari. Un studiu din 2019 a găsit șanse de aproximativ trei ori mai mari pentru consumul zilnic și de aproape cinci ori pentru consumul zilnic de cannabis cu cel puțin 10% THC. Autorii meta-analizei precizează însă că o legătură cauzală nu poate fi stabilită fără echivoc din aceste date.</a:t>
+            </a:r>
           </a:p>
         </p:txBody>
       </p:sp>
@@ -2743,10 +2693,8 @@
           <a:lstStyle/>
           <a:p>
             <a:r>
-              <a:rPr lang="en-US" dirty="0"/>
-              <a:t>Cifra a circulat mult: jumătate din cazurile noi de psihoză de la Amsterdam. Autorii au calculat-o presupunând cauzalitatea. Este o cifră care se calculează după ce ați acceptat că cannabisul produce psihoza, nu una care o dovedește.</a:t>
-            </a:r>
-            <a:endParaRPr lang="en-US" dirty="0"/>
+              <a:t>Același studiu din 2019 a calculat ce parte din cazurile noi de psihoză ar dispărea dacă ar dispărea cannabisul de mare concentrație. Cifra a circulat mult: la Amsterdam, aproximativ 50 din 100 de cazuri noi; la Londra, aproximativ 30 din 100; în toate cele 11 locuri luate împreună, aproximativ 12 din 100. Citiți însă cum își descriu autorii calculul: l-au făcut presupunând cauzalitatea. Este o cifră care se calculează după ce ați acceptat că cannabisul produce psihoza, nu una care o dovedește. Un studiu care compară bolnavi cu oameni sănătoși nu poate exclude singur că primele semne ale bolii au venit înaintea consumului. Asocierea a rămas după ajustarea pentru vârsta la primul consum, dar ajustarea nu spune ce a apărut mai întâi.</a:t>
+            </a:r>
           </a:p>
         </p:txBody>
       </p:sp>
@@ -2831,10 +2779,8 @@
           <a:lstStyle/>
           <a:p>
             <a:r>
-              <a:rPr lang="en-US" dirty="0"/>
-              <a:t>Un titlu real, publicat de BBC News despre studiul pe care tocmai l-am văzut. L-ați crede?</a:t>
-            </a:r>
-            <a:endParaRPr lang="en-US" dirty="0"/>
+              <a:t>Un titlu real, publicat de BBC News la 20 martie 2019, despre studiul pe care tocmai l-am văzut: cannabisul puternic crește riscul de boală psihică gravă, spune un studiu. L-ați crede? Votați pe Mentimeter: da, nu sau depinde ce a măsurat studiul. Înainte de vot, recitiți verbul din titlu.</a:t>
+            </a:r>
           </a:p>
         </p:txBody>
       </p:sp>
@@ -2919,10 +2865,8 @@
           <a:lstStyle/>
           <a:p>
             <a:r>
-              <a:rPr lang="en-US" dirty="0"/>
-              <a:t>Cuvântul de urmărit este „crește”: el descrie o cauză, iar studiul a măsurat o asociere. Un studiu genetic din 2018 se apropie mai mult de întrebarea despre direcție și sprijină ideea unui efect real, fără să închidă discuția. Ce nu e solid: mărimea exactă a efectului.</a:t>
-            </a:r>
-            <a:endParaRPr lang="en-US" dirty="0"/>
+              <a:t>Cuvântul de urmărit este „crește”: el spune că o cauză produce un efect, iar studiul a măsurat o asociere. Articolul însuși, citând specialiști, notează mai jos în text că studiul nu este o dovadă definitivă. Există însă o metodă care se apropie de întrebarea despre direcție fără să dea nimănui cannabis: un studiu genetic care folosește variantele genetice moștenite la întâmplare ca pe o tragere la sorți naturală. Un studiu din 2018 a estimat astfel că, la cei care consumă, șansele de schizofrenie sunt mai mari cu aproximativ o treime, iar datele obișnuite de observație au dat o estimare foarte apropiată. Ce rămâne solid: consumul frecvent se asociază cu psihoza, iar studiul genetic sprijină ideea unui efect real, fără să închidă discuția. Ce nu e solid: mărimea exactă a efectului.</a:t>
+            </a:r>
           </a:p>
         </p:txBody>
       </p:sp>
@@ -3007,10 +2951,8 @@
           <a:lstStyle/>
           <a:p>
             <a:r>
-              <a:rPr lang="en-US" dirty="0"/>
-              <a:t>Trei situații cu dovezi solide, iar la una dintre ele beneficiul îl simte pacientul, nu îl măsoară medicul. Cannabisul fumat zilnic, mai ales cel puternic, se leagă de psihoză; cât de mult, nu se știe exact.</a:t>
-            </a:r>
-            <a:endParaRPr lang="en-US" dirty="0"/>
+              <a:t>Partea a treia se încheie tot cu o frază pentru mâine. Trei situații au dovezi solide pentru un medicament din cannabis, iar la una dintre ele beneficiul îl simte pacientul, nu îl măsoară medicul. Cannabisul fumat zilnic, mai ales cel puternic, se leagă de psihoză; cât de mult, nu se știe exact. Scrieți-o în chat, cu cuvintele voastre.</a:t>
+            </a:r>
           </a:p>
         </p:txBody>
       </p:sp>
@@ -3095,10 +3037,8 @@
           <a:lstStyle/>
           <a:p>
             <a:r>
-              <a:rPr lang="en-US" dirty="0"/>
-              <a:t>Al treilea termen nou: legalizarea reglementată. Se vinde legal, ca alcoolul, dar cu reguli. Este altceva decât ce a făcut Portugalia. La tineri, rezultatul seamănă cu cel portughez: consumul nu a crescut cât se temea lumea, dar s-a schimbat felul în care se consumă.</a:t>
-            </a:r>
-            <a:endParaRPr lang="en-US" dirty="0"/>
+              <a:t>Al treilea termen nou: legalizarea reglementată. Consumul, producția și vânzarea unui drog interzis anterior devin permise, cu reguli stabilite de stat: licențe, vârstă minimă, controlul concentrației, taxe. În cuvinte obișnuite: se vinde legal, ca alcoolul, dar cu reguli. Este altceva decât ce a făcut Portugalia, unde consumul nu mai este penal, dar vânzarea a rămas interzisă. Potrivit unei sinteze din 2021, Canada, Uruguay și 12 state americane legalizaseră consumul recreațional la adulți. La tineri, rezultatul seamănă cu cel portughez: consumul în general nu a crescut cât se temea lumea, dar s-a schimbat felul consumului, mai mult zilnic și mai mult vaporizat. Iar produsele au devenit mai ieftine, cu mai multe produse de peste 70% THC.</a:t>
+            </a:r>
           </a:p>
         </p:txBody>
       </p:sp>
@@ -3183,10 +3123,8 @@
           <a:lstStyle/>
           <a:p>
             <a:r>
-              <a:rPr lang="en-US" dirty="0"/>
-              <a:t>Singurul grafic al ședinței. Cea mai clară schimbare nu privește adolescenții, ci copiii mici. La 100 000 de copii, vizitele la urgențe pentru cannabis au crescut de la aproximativ 2 pe an la aproximativ 6, apoi la aproximativ 18, după apariția comestibilelor. Mecanismul e banal: o bomboană arată ca o bomboană.</a:t>
-            </a:r>
-            <a:endParaRPr lang="en-US" dirty="0"/>
+              <a:t>Singurul grafic al ședinței. Cea mai clară schimbare nu privește adolescenții, ci copiii mici. Un studiu din provincia canadiană Ontario a urmărit vizitele copiilor între 0 și 9 ani în unitățile de primiri urgențe (UPU) pentru expunerea la cannabis, în trei perioade. La 100 000 de copii, vizitele anuale au crescut de la aproximativ 2 înainte de legalizare la aproximativ 6 după legalizarea florilor uscate și la aproximativ 18 după apariția în comerț a produselor comestibile, precum bomboanele și prăjiturile cu cannabis. Cazurile au devenit și mai grave: vizitele terminate cu internare au urcat de la aproximativ un sfert la aproape 4 din 10. Autorii interpretează creșterea ca sugerând că produsele comestibile comerciale au fost un factor-cheie. Mecanismul e banal: o bomboană arată ca o bomboană.</a:t>
+            </a:r>
           </a:p>
         </p:txBody>
       </p:sp>
@@ -3271,10 +3209,8 @@
           <a:lstStyle/>
           <a:p>
             <a:r>
-              <a:rPr lang="en-US" dirty="0"/>
-              <a:t>Dacă ar trebui să scrieți o singură regulă, care ar fi? Datele din Ontario vorbesc mai direct de una dintre variante, dar nu au comparat regulile între ele. Alegerea e o decizie de politică: exact separarea despre care vorbim azi.</a:t>
-            </a:r>
-            <a:endParaRPr lang="en-US" dirty="0"/>
+              <a:t>Dacă ar trebui să scrieți o singură regulă, care ar proteja cei mai mulți copii mici? Votați pe Mentimeter. Este un vot de opinie, fără o variantă corectă unică. Datele din Ontario vorbesc mai direct de una dintre variante, dar nu au comparat regulile între ele. Alegerea este o decizie de politică: exact separarea despre care vorbim azi.</a:t>
+            </a:r>
           </a:p>
         </p:txBody>
       </p:sp>
@@ -3359,10 +3295,8 @@
           <a:lstStyle/>
           <a:p>
             <a:r>
-              <a:rPr lang="en-US" dirty="0"/>
-              <a:t>Acolo unde cannabisul s-a legalizat, consumul adolescenților nu a explodat, dar s-a schimbat felul în care se consumă. Cei care au plătit cel mai clar au fost copiii mici.</a:t>
-            </a:r>
-            <a:endParaRPr lang="en-US" dirty="0"/>
+              <a:t>Partea a patra se încheie cu ultima frază pentru mâine. Acolo unde cannabisul s-a legalizat, consumul adolescenților nu a explodat, dar s-a schimbat felul în care se consumă. Iar cei care au plătit cel mai clar au fost copiii mici, din cauza produselor care arată ca dulciurile. Scrieți-o în chat, cu cuvintele voastre.</a:t>
+            </a:r>
           </a:p>
         </p:txBody>
       </p:sp>
@@ -3447,10 +3381,8 @@
           <a:lstStyle/>
           <a:p>
             <a:r>
-              <a:rPr lang="en-US" dirty="0"/>
-              <a:t>Votați acum, înainte de orice cifră. Nu există variantă greșită; contează prima impresie. La finalul părții a doua votăm din nou pe aceeași moțiune.</a:t>
-            </a:r>
-            <a:endParaRPr lang="en-US" dirty="0"/>
+              <a:t>Votați acum pe Mentimeter, înainte de orice cifră: codul e pe ecran, iar linkul e și în chat. Moțiunea: România ar trebui să adopte modelul portughez de dezincriminare a consumului personal de droguri. Nu există variantă greșită; contează prima impresie. La finalul părții a doua votăm din nou pe aceeași moțiune.</a:t>
+            </a:r>
           </a:p>
         </p:txBody>
       </p:sp>
@@ -3535,10 +3467,8 @@
           <a:lstStyle/>
           <a:p>
             <a:r>
-              <a:rPr lang="en-US" dirty="0"/>
-              <a:t>Șase lucruri pe care le puteți face de mâine, ca studenți și ca viitori medici.</a:t>
-            </a:r>
-            <a:endParaRPr lang="en-US" dirty="0"/>
+              <a:t>Șase lucruri pe care le puteți face de mâine, ca studenți și ca viitori medici. Când citiți un titlu despre droguri, despărțiți-l în două: ce s-a întâmplat, cu sursa și anul, și ce ar trebui să facem, cu valorile. Când cineva spune că Portugalia a legalizat drogurile, îl corectați: le-a dezincriminat, iar vânzarea a rămas ilegală. La cannabisul pentru greața de la chimioterapie: un adaos la tratamentul standard, când acesta nu a ajuns, cu oncologul; pentru tratamentul cancerului, numai în studii clinice. La spasticitate, căutați în sursă cuvintele „raportat de pacient”. La „jumătate din cazuri s-ar evita”, întrebați ce a presupus calculul. Iar când un coleg consumă zilnic și are episoade ciudate, nu glumiți: îl îndemnați să vorbească cu un medic.</a:t>
+            </a:r>
           </a:p>
         </p:txBody>
       </p:sp>
@@ -3623,10 +3553,8 @@
           <a:lstStyle/>
           <a:p>
             <a:r>
-              <a:rPr lang="en-US" dirty="0"/>
-              <a:t>Zece întrebări despre ce am discutat azi. Rezultatul nu se notează.</a:t>
-            </a:r>
-            <a:endParaRPr lang="en-US" dirty="0"/>
+              <a:t>Zece întrebări despre ce am discutat azi: Lisabona, taberele, farmacia și Ontario. Intrați pe kahoot.it cu codul de pe ecran sau folosiți linkul din chat. Rezultatul nu se notează. După fiecare întrebare apar varianta corectă și sursa ei.</a:t>
+            </a:r>
           </a:p>
         </p:txBody>
       </p:sp>
@@ -3711,10 +3639,8 @@
           <a:lstStyle/>
           <a:p>
             <a:r>
-              <a:rPr lang="en-US" dirty="0"/>
-              <a:t>Ce nu putem afirma pe baza surselor de azi. Lista completă e în note.</a:t>
-            </a:r>
-            <a:endParaRPr lang="en-US" dirty="0"/>
+              <a:t>Înainte de final, ce nu poate fi afirmat pe baza surselor de azi. Nu cunoaștem forma în vigoare azi a legii portugheze: am citit forma inițială. Nu am putut verifica, într-o sursă primară, cifrele exacte ale rezultatelor portugheze care circulă și nici evoluția deceselor din ultimii ani. Nu putem spune cât din scăderea infecțiilor și a deceselor se datorează legii și cât serviciilor. Și nu știm cât de mare este, exact, efectul cannabisului asupra riscului de psihoză. Lista completă e în note.</a:t>
+            </a:r>
           </a:p>
         </p:txBody>
       </p:sp>
@@ -3799,10 +3725,8 @@
           <a:lstStyle/>
           <a:p>
             <a:r>
-              <a:rPr lang="en-US" dirty="0"/>
-              <a:t>Trei întrebări anonime, pe Mentimeter. Luni, pe pagina disciplinei, veți găsi două lucruri schimbate după răspunsurile voastre. Mulțumesc.</a:t>
-            </a:r>
-            <a:endParaRPr lang="en-US" dirty="0"/>
+              <a:t>Ultimele minute sunt pentru voi: trei întrebări anonime pe Mentimeter. Ce a fost util, unde v-am pierdut și ce ați putea folosi mâine. Scanați codul de pe ecran sau folosiți linkul din chat. Luni, pe pagina disciplinei, veți găsi două lucruri schimbate după răspunsurile voastre. Mulțumesc.</a:t>
+            </a:r>
           </a:p>
         </p:txBody>
       </p:sp>
@@ -3887,10 +3811,8 @@
           <a:lstStyle/>
           <a:p>
             <a:r>
-              <a:rPr lang="en-US" dirty="0"/>
-              <a:t>Multe discuții despre modelul portughez se poartă fără textul legii. Iată-l, în forma publicată în 2000: consumul și deținerea pentru consum propriu devin contravenții, în limita cantității pentru zece zile. Legea privea toate drogurile. Vânzarea a rămas penală. Iar cine cerea singur ajutor nu intra sub lege.</a:t>
-            </a:r>
-            <a:endParaRPr lang="en-US" dirty="0"/>
+              <a:t>Multe discuții despre modelul portughez se poartă fără textul legii. Iată-l, în forma publicată în 2000. Legea portugheză nr. 30/2000 prevedea că consumul, achiziția și deținerea pentru consum propriu sunt contravenții, nu infracțiuni. Achiziția și deținerea nu puteau depăși cantitatea necesară pentru consumul mediu individual pe zece zile. Legea a intrat în vigoare la 1 iulie 2001. Din text rețineți trei prevederi. Legea privea toate drogurile, nu numai cannabisul. Vânzarea a rămas tratată ca faptă penală: consumatorul e privit ca o persoană care are nevoie de îngrijire, vânzătorul ca infractor. Iar cine cerea singur ajutor unui serviciu de sănătate nu intra sub lege, iar personalul medical care îl trata păstra secretul profesional. Este forma inițială a legii; forma în vigoare azi nu a putut fi verificată.</a:t>
+            </a:r>
           </a:p>
         </p:txBody>
       </p:sp>
@@ -3975,10 +3897,8 @@
           <a:lstStyle/>
           <a:p>
             <a:r>
-              <a:rPr lang="en-US" dirty="0"/>
-              <a:t>Instituția pe care România nu o are: comisia pentru descurajarea toxicodependenței. Trei membri, dintre care unul jurist. Pentru un tânăr fără dosar anterior și fără dependență, procedura se suspenda provizoriu. În locul amenzii, comisia putea aplica o simplă admonestare.</a:t>
-            </a:r>
-            <a:endParaRPr lang="en-US" dirty="0"/>
+              <a:t>Instituția pe care România nu o are: comisia pentru descurajarea toxicodependenței. În forma din 2000 a legii, ea avea trei membri: un jurist, desemnat de ministrul justiției, iar ceilalți aleși dintre medici, psihologi, sociologi, asistenți sociali sau alți specialiști în domeniu. O analiză ulterioară arată că, la data ei, comisiile funcționau în răspunderea Ministerului Sănătății. O regulă contează mult pentru viața unui tânăr. Dacă persoana nu mai avusese un dosar de acest fel și era considerată consumator fără dependență, comisia suspenda provizoriu procedura. Dacă avea o dependență, nu avea un dosar anterior și accepta tratamentul, procedura se suspenda de asemenea. În locul amenzii, comisia putea aplica o simplă admonestare.</a:t>
+            </a:r>
           </a:p>
         </p:txBody>
       </p:sp>
@@ -4063,10 +3983,8 @@
           <a:lstStyle/>
           <a:p>
             <a:r>
-              <a:rPr lang="en-US" dirty="0"/>
-              <a:t>La noi, deținerea pentru consum propriu este infracțiune. Există și la noi o cale spre sănătate: evaluarea dispusă de procuror și programul de asistență. Diferența față de Portugalia este că, la noi, această cale trece prin dosarul penal.</a:t>
-            </a:r>
-            <a:endParaRPr lang="en-US" dirty="0"/>
+              <a:t>La noi, deținerea de droguri pentru consum propriu este infracțiune. Pentru drogurile de risc, legea prevede închisoare de la 3 luni la 2 ani sau amendă; pentru drogurile de mare risc, închisoare de la 6 luni la 3 ani. Legea română are și ea o cale spre sănătate: procurorul poate dispune evaluarea persoanei, în vederea includerii într-un program de asistență, iar dacă persoana respectă programul, instanța poate renunța la aplicarea pedepsei sau o poate amâna. Există, așadar, și la noi o cale spre tratament. Diferența față de Portugalia este că, la noi, această cale trece prin dosarul penal. Țineți minte diferența: o folosiți imediat, în exercițiul următor.</a:t>
+            </a:r>
           </a:p>
         </p:txBody>
       </p:sp>
@@ -4151,10 +4069,8 @@
           <a:lstStyle/>
           <a:p>
             <a:r>
-              <a:rPr lang="en-US" dirty="0"/>
-              <a:t>Același student, aceeași cantitate, aceeași zi, două orașe. Scrieți în două coloane ce i se întâmplă în fiecare oraș în luna următoare.</a:t>
-            </a:r>
-            <a:endParaRPr lang="en-US" dirty="0"/>
+              <a:t>Același student, aceeași cantitate mică de cannabis, aceeași zi, două orașe: Lisabona și Cluj. Ce i se întâmplă în fiecare oraș în luna următoare? Scrieți în chat două rânduri: unul care începe cu „Lisabona:”, celălalt cu „Cluj:”. Folosiți ce ați văzut pe ultimele trei diapozitive. Apoi citim împreună câteva dintre răspunsurile voastre.</a:t>
+            </a:r>
           </a:p>
         </p:txBody>
       </p:sp>
@@ -4239,10 +4155,8 @@
           <a:lstStyle/>
           <a:p>
             <a:r>
-              <a:rPr lang="en-US" dirty="0"/>
-              <a:t>Un singur vot, înainte de date: ce credeți că s-a întâmplat cu consumul după 2001?</a:t>
-            </a:r>
-            <a:endParaRPr lang="en-US" dirty="0"/>
+              <a:t>Un singur vot pe Mentimeter, înainte de date: ce credeți că s-a întâmplat cu consumul de droguri în Portugalia după 2001? A crescut mult, a rămas aproximativ la fel sau a scăzut? Votați după ce știți acum; codul e pe ecran, linkul e și în chat. Discutăm imediat după, pe baza unei surse.</a:t>
+            </a:r>
           </a:p>
         </p:txBody>
       </p:sp>
@@ -4929,7 +4843,7 @@
                 <a:ea typeface="Palatino Linotype" pitchFamily="34" charset="-122"/>
                 <a:cs typeface="Palatino Linotype" pitchFamily="34" charset="-120"/>
               </a:rPr>
-              <a:t>Deschideți Mentimeter de acum: votăm în primele minute.</a:t>
+              <a:t>Linkul Mentimeter e și în chat: votăm în primele minute.</a:t>
             </a:r>
             <a:endParaRPr lang="en-US" sz="1300" dirty="0"/>
           </a:p>
@@ -6535,7 +6449,7 @@
                 <a:ea typeface="Palatino Linotype" pitchFamily="34" charset="-122"/>
                 <a:cs typeface="Palatino Linotype" pitchFamily="34" charset="-120"/>
               </a:rPr>
-              <a:t>După vot, trei răspunsuri din sală: ce cuvânt din titlu depășește datele?</a:t>
+              <a:t>După vot, trei răspunsuri în chat: ce cuvânt din titlu depășește datele?</a:t>
             </a:r>
             <a:endParaRPr lang="en-US" sz="2000" dirty="0"/>
           </a:p>
@@ -7565,7 +7479,7 @@
                 <a:ea typeface="Palatino Linotype" pitchFamily="34" charset="-122"/>
                 <a:cs typeface="Palatino Linotype" pitchFamily="34" charset="-120"/>
               </a:rPr>
-              <a:t>PERECHI · 30 DE SECUNDE</a:t>
+              <a:t>CHAT · 30 DE SECUNDE</a:t>
             </a:r>
             <a:endParaRPr lang="en-US" sz="1300" dirty="0"/>
           </a:p>
@@ -7750,7 +7664,7 @@
                 <a:ea typeface="Palatino Linotype" pitchFamily="34" charset="-122"/>
                 <a:cs typeface="Palatino Linotype" pitchFamily="34" charset="-120"/>
               </a:rPr>
-              <a:t>Spuneți-o, cu cuvintele voastre, colegului de bancă.</a:t>
+              <a:t>Scrieți-o în chat, cu cuvintele voastre, într-o frază.</a:t>
             </a:r>
             <a:endParaRPr lang="en-US" sz="1600" dirty="0"/>
           </a:p>
@@ -8039,7 +7953,7 @@
                 <a:ea typeface="Palatino Linotype" pitchFamily="34" charset="-122"/>
                 <a:cs typeface="Palatino Linotype" pitchFamily="34" charset="-120"/>
               </a:rPr>
-              <a:t>STÂNGA SĂLII</a:t>
+              <a:t>NĂSCUȚI IAN.–IUN.</a:t>
             </a:r>
             <a:endParaRPr lang="en-US" sz="2200" dirty="0"/>
           </a:p>
@@ -8148,7 +8062,7 @@
                 <a:ea typeface="Palatino Linotype" pitchFamily="34" charset="-122"/>
                 <a:cs typeface="Palatino Linotype" pitchFamily="34" charset="-120"/>
               </a:rPr>
-              <a:t>DREAPTA SĂLII</a:t>
+              <a:t>NĂSCUȚI IUL.–DEC.</a:t>
             </a:r>
             <a:endParaRPr lang="en-US" sz="2200" dirty="0"/>
           </a:p>
@@ -8226,7 +8140,7 @@
                 <a:ea typeface="Palatino Linotype" pitchFamily="34" charset="-122"/>
                 <a:cs typeface="Palatino Linotype" pitchFamily="34" charset="-120"/>
               </a:rPr>
-              <a:t>Indiferent ce ați votat la început. Trei minute: strângeți argumentele.</a:t>
+              <a:t>Indiferent de primul vot. În chat, cu „PENTRU” sau „ÎMPOTRIVĂ” în față.</a:t>
             </a:r>
             <a:endParaRPr lang="en-US" sz="1800" dirty="0"/>
           </a:p>
@@ -9032,7 +8946,7 @@
                 <a:ea typeface="Palatino Linotype" pitchFamily="34" charset="-122"/>
                 <a:cs typeface="Palatino Linotype" pitchFamily="34" charset="-120"/>
               </a:rPr>
-              <a:t>Ceilalți notează: ce afirmație din argument s-ar putea verifica într-o sursă?</a:t>
+              <a:t>Voluntari: „mână ridicată”. Ceilalți scriu în chat ce afirmație se poate verifica.</a:t>
             </a:r>
             <a:endParaRPr lang="en-US" sz="1900" dirty="0"/>
           </a:p>
@@ -12858,7 +12772,7 @@
                 <a:ea typeface="Palatino Linotype" pitchFamily="34" charset="-122"/>
                 <a:cs typeface="Palatino Linotype" pitchFamily="34" charset="-120"/>
               </a:rPr>
-              <a:t>PERECHI · 30 DE SECUNDE</a:t>
+              <a:t>CHAT · 30 DE SECUNDE</a:t>
             </a:r>
             <a:endParaRPr lang="en-US" sz="1300" dirty="0"/>
           </a:p>
@@ -13043,7 +12957,7 @@
                 <a:ea typeface="Palatino Linotype" pitchFamily="34" charset="-122"/>
                 <a:cs typeface="Palatino Linotype" pitchFamily="34" charset="-120"/>
               </a:rPr>
-              <a:t>Spuneți-o, cu cuvintele voastre, colegului de bancă.</a:t>
+              <a:t>Scrieți-o în chat, cu cuvintele voastre, într-o frază.</a:t>
             </a:r>
             <a:endParaRPr lang="en-US" sz="1600" dirty="0"/>
           </a:p>
@@ -16239,7 +16153,7 @@
                 <a:ea typeface="Palatino Linotype" pitchFamily="34" charset="-122"/>
                 <a:cs typeface="Palatino Linotype" pitchFamily="34" charset="-120"/>
               </a:rPr>
-              <a:t>PERECHI · 2 MINUTE</a:t>
+              <a:t>ÎN CHAT · 2 MINUTE</a:t>
             </a:r>
             <a:endParaRPr lang="en-US" sz="1300" dirty="0"/>
           </a:p>
@@ -16278,7 +16192,7 @@
                 <a:ea typeface="Palatino Linotype" pitchFamily="34" charset="-122"/>
                 <a:cs typeface="Palatino Linotype" pitchFamily="34" charset="-120"/>
               </a:rPr>
-              <a:t>LUCRAȚI CU COLEGUL DE BANCĂ</a:t>
+              <a:t>SCRIEȚI ÎN CHATUL TEAMS</a:t>
             </a:r>
             <a:endParaRPr lang="en-US" sz="1300" dirty="0"/>
           </a:p>
@@ -16570,7 +16484,7 @@
                 <a:ea typeface="Palatino Linotype" pitchFamily="34" charset="-122"/>
                 <a:cs typeface="Palatino Linotype" pitchFamily="34" charset="-120"/>
               </a:rPr>
-              <a:t>Cine are dreptate? Notați două explicații posibile.</a:t>
+              <a:t>Cine are dreptate? Două explicații posibile, în chat.</a:t>
             </a:r>
             <a:endParaRPr lang="en-US" sz="2400" dirty="0"/>
           </a:p>
@@ -20463,7 +20377,7 @@
                 <a:ea typeface="Palatino Linotype" pitchFamily="34" charset="-122"/>
                 <a:cs typeface="Palatino Linotype" pitchFamily="34" charset="-120"/>
               </a:rPr>
-              <a:t>PERECHI · 30 DE SECUNDE</a:t>
+              <a:t>CHAT · 30 DE SECUNDE</a:t>
             </a:r>
             <a:endParaRPr lang="en-US" sz="1300" dirty="0"/>
           </a:p>
@@ -20648,7 +20562,7 @@
                 <a:ea typeface="Palatino Linotype" pitchFamily="34" charset="-122"/>
                 <a:cs typeface="Palatino Linotype" pitchFamily="34" charset="-120"/>
               </a:rPr>
-              <a:t>Spuneți-o, cu cuvintele voastre, colegului de bancă.</a:t>
+              <a:t>Scrieți-o în chat, cu cuvintele voastre, într-o frază.</a:t>
             </a:r>
             <a:endParaRPr lang="en-US" sz="1600" dirty="0"/>
           </a:p>
@@ -22999,7 +22913,7 @@
                 <a:ea typeface="Palatino Linotype" pitchFamily="34" charset="-122"/>
                 <a:cs typeface="Palatino Linotype" pitchFamily="34" charset="-120"/>
               </a:rPr>
-              <a:t>PERECHI · 30 DE SECUNDE</a:t>
+              <a:t>CHAT · 30 DE SECUNDE</a:t>
             </a:r>
             <a:endParaRPr lang="en-US" sz="1300" dirty="0"/>
           </a:p>
@@ -23184,7 +23098,7 @@
                 <a:ea typeface="Palatino Linotype" pitchFamily="34" charset="-122"/>
                 <a:cs typeface="Palatino Linotype" pitchFamily="34" charset="-120"/>
               </a:rPr>
-              <a:t>Spuneți-o, cu cuvintele voastre, colegului de bancă.</a:t>
+              <a:t>Scrieți-o în chat, cu cuvintele voastre, într-o frază.</a:t>
             </a:r>
             <a:endParaRPr lang="en-US" sz="1600" dirty="0"/>
           </a:p>
@@ -24796,7 +24710,7 @@
                 <a:ea typeface="Palatino Linotype" pitchFamily="34" charset="-122"/>
                 <a:cs typeface="Palatino Linotype" pitchFamily="34" charset="-120"/>
               </a:rPr>
-              <a:t>Accesați kahoot.it și introduceți codul jocului.</a:t>
+              <a:t>Accesați kahoot.it sau linkul din chat.</a:t>
             </a:r>
             <a:endParaRPr lang="en-US" sz="2200" dirty="0"/>
           </a:p>
@@ -25773,7 +25687,7 @@
                 <a:ea typeface="Palatino Linotype" pitchFamily="34" charset="-122"/>
                 <a:cs typeface="Palatino Linotype" pitchFamily="34" charset="-120"/>
               </a:rPr>
-              <a:t>Luni, pe pagina disciplinei, veți găsi două lucruri schimbate după răspunsuri.</a:t>
+              <a:t>Linkul e și în chat. Luni, pe pagina disciplinei: două lucruri schimbate după răspunsuri.</a:t>
             </a:r>
             <a:endParaRPr lang="en-US" sz="1700" dirty="0"/>
           </a:p>
@@ -27867,7 +27781,7 @@
                 <a:ea typeface="Palatino Linotype" pitchFamily="34" charset="-122"/>
                 <a:cs typeface="Palatino Linotype" pitchFamily="34" charset="-120"/>
               </a:rPr>
-              <a:t>PERECHI · 2 MINUTE</a:t>
+              <a:t>ÎN CHAT · 2 MINUTE</a:t>
             </a:r>
             <a:endParaRPr lang="en-US" sz="1300" dirty="0"/>
           </a:p>
@@ -27906,7 +27820,7 @@
                 <a:ea typeface="Palatino Linotype" pitchFamily="34" charset="-122"/>
                 <a:cs typeface="Palatino Linotype" pitchFamily="34" charset="-120"/>
               </a:rPr>
-              <a:t>LUCRAȚI CU COLEGUL DE BANCĂ</a:t>
+              <a:t>SCRIEȚI ÎN CHATUL TEAMS</a:t>
             </a:r>
             <a:endParaRPr lang="en-US" sz="1300" dirty="0"/>
           </a:p>
@@ -28325,7 +28239,7 @@
                 <a:ea typeface="Palatino Linotype" pitchFamily="34" charset="-122"/>
                 <a:cs typeface="Palatino Linotype" pitchFamily="34" charset="-120"/>
               </a:rPr>
-              <a:t>Scrieți în două coloane. Apoi doi colegi citesc pentru toată sala.</a:t>
+              <a:t>Scrieți în chat: „Lisabona: …; Cluj: …”. Apoi citim câteva răspunsuri.</a:t>
             </a:r>
             <a:endParaRPr lang="en-US" sz="1600" dirty="0"/>
           </a:p>
